--- a/figures_direction/overall/overall_direction_null.pptx
+++ b/figures_direction/overall/overall_direction_null.pptx
@@ -6093,303 +6093,303 @@
           </p:nvSpPr>
           <p:spPr>
             <a:xfrm>
-              <a:off x="1859450" y="1152850"/>
-              <a:ext cx="934309" cy="543388"/>
+              <a:off x="1858803" y="1155771"/>
+              <a:ext cx="936237" cy="540980"/>
             </a:xfrm>
             <a:custGeom>
               <a:avLst/>
               <a:pathLst>
-                <a:path w="934309" h="543388">
+                <a:path w="936237" h="540980">
                   <a:moveTo>
-                    <a:pt x="110154" y="210038"/>
+                    <a:pt x="110800" y="206677"/>
                   </a:moveTo>
                   <a:lnTo>
-                    <a:pt x="118746" y="185268"/>
-                  </a:lnTo>
-                  <a:lnTo>
-                    <a:pt x="130112" y="161137"/>
-                  </a:lnTo>
-                  <a:lnTo>
-                    <a:pt x="144201" y="137877"/>
-                  </a:lnTo>
-                  <a:lnTo>
-                    <a:pt x="160949" y="115718"/>
-                  </a:lnTo>
-                  <a:lnTo>
-                    <a:pt x="180272" y="94882"/>
-                  </a:lnTo>
-                  <a:lnTo>
-                    <a:pt x="202069" y="75589"/>
-                  </a:lnTo>
-                  <a:lnTo>
-                    <a:pt x="226224" y="58049"/>
-                  </a:lnTo>
-                  <a:lnTo>
-                    <a:pt x="252605" y="42464"/>
-                  </a:lnTo>
-                  <a:lnTo>
-                    <a:pt x="281065" y="29026"/>
-                  </a:lnTo>
-                  <a:lnTo>
-                    <a:pt x="311442" y="17919"/>
-                  </a:lnTo>
-                  <a:lnTo>
-                    <a:pt x="343560" y="9311"/>
-                  </a:lnTo>
-                  <a:lnTo>
-                    <a:pt x="377232" y="3361"/>
-                  </a:lnTo>
-                  <a:lnTo>
-                    <a:pt x="412256" y="214"/>
-                  </a:lnTo>
-                  <a:lnTo>
-                    <a:pt x="448421" y="0"/>
-                  </a:lnTo>
-                  <a:lnTo>
-                    <a:pt x="477017" y="2099"/>
-                  </a:lnTo>
-                  <a:lnTo>
-                    <a:pt x="506047" y="6073"/>
-                  </a:lnTo>
-                  <a:lnTo>
-                    <a:pt x="535400" y="11964"/>
-                  </a:lnTo>
-                  <a:lnTo>
-                    <a:pt x="564964" y="19805"/>
-                  </a:lnTo>
-                  <a:lnTo>
-                    <a:pt x="594623" y="29626"/>
-                  </a:lnTo>
-                  <a:lnTo>
-                    <a:pt x="624261" y="41447"/>
-                  </a:lnTo>
-                  <a:lnTo>
-                    <a:pt x="653758" y="55284"/>
-                  </a:lnTo>
-                  <a:lnTo>
-                    <a:pt x="682994" y="71147"/>
-                  </a:lnTo>
-                  <a:lnTo>
-                    <a:pt x="711848" y="89037"/>
-                  </a:lnTo>
-                  <a:lnTo>
-                    <a:pt x="740197" y="108950"/>
-                  </a:lnTo>
-                  <a:lnTo>
-                    <a:pt x="767921" y="130873"/>
-                  </a:lnTo>
-                  <a:lnTo>
-                    <a:pt x="794896" y="154790"/>
-                  </a:lnTo>
-                  <a:lnTo>
-                    <a:pt x="821002" y="180675"/>
-                  </a:lnTo>
-                  <a:lnTo>
-                    <a:pt x="846117" y="208496"/>
-                  </a:lnTo>
-                  <a:lnTo>
-                    <a:pt x="870122" y="238215"/>
-                  </a:lnTo>
-                  <a:lnTo>
-                    <a:pt x="892900" y="269785"/>
-                  </a:lnTo>
-                  <a:lnTo>
-                    <a:pt x="914333" y="303155"/>
-                  </a:lnTo>
-                  <a:lnTo>
-                    <a:pt x="934309" y="338267"/>
-                  </a:lnTo>
-                  <a:lnTo>
-                    <a:pt x="904125" y="367975"/>
-                  </a:lnTo>
-                  <a:lnTo>
-                    <a:pt x="872913" y="395427"/>
-                  </a:lnTo>
-                  <a:lnTo>
-                    <a:pt x="840799" y="420591"/>
-                  </a:lnTo>
-                  <a:lnTo>
-                    <a:pt x="807912" y="443437"/>
-                  </a:lnTo>
-                  <a:lnTo>
-                    <a:pt x="774380" y="463945"/>
-                  </a:lnTo>
-                  <a:lnTo>
-                    <a:pt x="740330" y="482100"/>
-                  </a:lnTo>
-                  <a:lnTo>
-                    <a:pt x="705892" y="497894"/>
-                  </a:lnTo>
-                  <a:lnTo>
-                    <a:pt x="671194" y="511325"/>
-                  </a:lnTo>
-                  <a:lnTo>
-                    <a:pt x="636365" y="522396"/>
-                  </a:lnTo>
-                  <a:lnTo>
-                    <a:pt x="601531" y="531118"/>
-                  </a:lnTo>
-                  <a:lnTo>
-                    <a:pt x="566820" y="537508"/>
-                  </a:lnTo>
-                  <a:lnTo>
-                    <a:pt x="532356" y="541589"/>
-                  </a:lnTo>
-                  <a:lnTo>
-                    <a:pt x="498263" y="543388"/>
-                  </a:lnTo>
-                  <a:lnTo>
-                    <a:pt x="464663" y="542942"/>
-                  </a:lnTo>
-                  <a:lnTo>
-                    <a:pt x="431675" y="540291"/>
-                  </a:lnTo>
-                  <a:lnTo>
-                    <a:pt x="399415" y="535482"/>
-                  </a:lnTo>
-                  <a:lnTo>
-                    <a:pt x="368000" y="528565"/>
-                  </a:lnTo>
-                  <a:lnTo>
-                    <a:pt x="337539" y="519600"/>
-                  </a:lnTo>
-                  <a:lnTo>
-                    <a:pt x="308142" y="508649"/>
-                  </a:lnTo>
-                  <a:lnTo>
-                    <a:pt x="279913" y="495780"/>
-                  </a:lnTo>
-                  <a:lnTo>
-                    <a:pt x="252954" y="481067"/>
-                  </a:lnTo>
-                  <a:lnTo>
-                    <a:pt x="222778" y="485042"/>
-                  </a:lnTo>
-                  <a:lnTo>
-                    <a:pt x="194185" y="483812"/>
-                  </a:lnTo>
-                  <a:lnTo>
-                    <a:pt x="167984" y="477881"/>
-                  </a:lnTo>
-                  <a:lnTo>
-                    <a:pt x="144880" y="467868"/>
-                  </a:lnTo>
-                  <a:lnTo>
-                    <a:pt x="125455" y="454492"/>
-                  </a:lnTo>
-                  <a:lnTo>
-                    <a:pt x="110154" y="438551"/>
-                  </a:lnTo>
-                  <a:lnTo>
-                    <a:pt x="92760" y="448086"/>
-                  </a:lnTo>
-                  <a:lnTo>
-                    <a:pt x="72425" y="454384"/>
-                  </a:lnTo>
-                  <a:lnTo>
-                    <a:pt x="49774" y="456768"/>
-                  </a:lnTo>
-                  <a:lnTo>
-                    <a:pt x="25570" y="454686"/>
-                  </a:lnTo>
-                  <a:lnTo>
-                    <a:pt x="689" y="447731"/>
-                  </a:lnTo>
-                  <a:lnTo>
-                    <a:pt x="0" y="418298"/>
-                  </a:lnTo>
-                  <a:lnTo>
-                    <a:pt x="5451" y="391615"/>
-                  </a:lnTo>
-                  <a:lnTo>
-                    <a:pt x="16130" y="368817"/>
-                  </a:lnTo>
-                  <a:lnTo>
-                    <a:pt x="30927" y="350815"/>
-                  </a:lnTo>
-                  <a:lnTo>
-                    <a:pt x="48588" y="338267"/>
-                  </a:lnTo>
-                  <a:lnTo>
-                    <a:pt x="55936" y="315809"/>
-                  </a:lnTo>
-                  <a:lnTo>
-                    <a:pt x="70694" y="298807"/>
-                  </a:lnTo>
-                  <a:lnTo>
-                    <a:pt x="60952" y="306455"/>
-                  </a:lnTo>
-                  <a:lnTo>
-                    <a:pt x="52767" y="316503"/>
-                  </a:lnTo>
-                  <a:lnTo>
-                    <a:pt x="46724" y="328613"/>
-                  </a:lnTo>
-                  <a:lnTo>
-                    <a:pt x="43330" y="342309"/>
-                  </a:lnTo>
-                  <a:lnTo>
-                    <a:pt x="42983" y="356992"/>
-                  </a:lnTo>
-                  <a:lnTo>
-                    <a:pt x="45943" y="371967"/>
-                  </a:lnTo>
-                  <a:lnTo>
-                    <a:pt x="52306" y="386476"/>
-                  </a:lnTo>
-                  <a:lnTo>
-                    <a:pt x="61995" y="399737"/>
-                  </a:lnTo>
-                  <a:lnTo>
-                    <a:pt x="74750" y="410979"/>
-                  </a:lnTo>
-                  <a:lnTo>
-                    <a:pt x="90133" y="419495"/>
-                  </a:lnTo>
-                  <a:lnTo>
-                    <a:pt x="107543" y="424672"/>
-                  </a:lnTo>
-                  <a:lnTo>
-                    <a:pt x="126238" y="426036"/>
-                  </a:lnTo>
-                  <a:lnTo>
-                    <a:pt x="145367" y="423278"/>
-                  </a:lnTo>
-                  <a:lnTo>
-                    <a:pt x="164007" y="416287"/>
-                  </a:lnTo>
-                  <a:lnTo>
-                    <a:pt x="181211" y="405156"/>
-                  </a:lnTo>
-                  <a:lnTo>
-                    <a:pt x="196051" y="390193"/>
-                  </a:lnTo>
-                  <a:lnTo>
-                    <a:pt x="207670" y="371917"/>
-                  </a:lnTo>
-                  <a:lnTo>
-                    <a:pt x="215325" y="351037"/>
-                  </a:lnTo>
-                  <a:lnTo>
-                    <a:pt x="218437" y="328427"/>
-                  </a:lnTo>
-                  <a:lnTo>
-                    <a:pt x="216620" y="305090"/>
-                  </a:lnTo>
-                  <a:lnTo>
-                    <a:pt x="209712" y="282116"/>
-                  </a:lnTo>
-                  <a:lnTo>
-                    <a:pt x="197794" y="260624"/>
-                  </a:lnTo>
-                  <a:lnTo>
-                    <a:pt x="181197" y="241716"/>
-                  </a:lnTo>
-                  <a:lnTo>
-                    <a:pt x="160494" y="226415"/>
-                  </a:lnTo>
-                  <a:lnTo>
-                    <a:pt x="136482" y="215618"/>
+                    <a:pt x="119399" y="182234"/>
+                  </a:lnTo>
+                  <a:lnTo>
+                    <a:pt x="130734" y="158427"/>
+                  </a:lnTo>
+                  <a:lnTo>
+                    <a:pt x="144758" y="135488"/>
+                  </a:lnTo>
+                  <a:lnTo>
+                    <a:pt x="161403" y="113641"/>
+                  </a:lnTo>
+                  <a:lnTo>
+                    <a:pt x="180588" y="93107"/>
+                  </a:lnTo>
+                  <a:lnTo>
+                    <a:pt x="202214" y="74102"/>
+                  </a:lnTo>
+                  <a:lnTo>
+                    <a:pt x="226164" y="56833"/>
+                  </a:lnTo>
+                  <a:lnTo>
+                    <a:pt x="252309" y="41500"/>
+                  </a:lnTo>
+                  <a:lnTo>
+                    <a:pt x="280503" y="28292"/>
+                  </a:lnTo>
+                  <a:lnTo>
+                    <a:pt x="310586" y="17389"/>
+                  </a:lnTo>
+                  <a:lnTo>
+                    <a:pt x="342384" y="8960"/>
+                  </a:lnTo>
+                  <a:lnTo>
+                    <a:pt x="375711" y="3159"/>
+                  </a:lnTo>
+                  <a:lnTo>
+                    <a:pt x="410368" y="130"/>
+                  </a:lnTo>
+                  <a:lnTo>
+                    <a:pt x="446147" y="0"/>
+                  </a:lnTo>
+                  <a:lnTo>
+                    <a:pt x="474840" y="1765"/>
+                  </a:lnTo>
+                  <a:lnTo>
+                    <a:pt x="503990" y="5421"/>
+                  </a:lnTo>
+                  <a:lnTo>
+                    <a:pt x="533485" y="11009"/>
+                  </a:lnTo>
+                  <a:lnTo>
+                    <a:pt x="563212" y="18564"/>
+                  </a:lnTo>
+                  <a:lnTo>
+                    <a:pt x="593054" y="28117"/>
+                  </a:lnTo>
+                  <a:lnTo>
+                    <a:pt x="622893" y="39689"/>
+                  </a:lnTo>
+                  <a:lnTo>
+                    <a:pt x="652608" y="53299"/>
+                  </a:lnTo>
+                  <a:lnTo>
+                    <a:pt x="682077" y="68955"/>
+                  </a:lnTo>
+                  <a:lnTo>
+                    <a:pt x="711178" y="86661"/>
+                  </a:lnTo>
+                  <a:lnTo>
+                    <a:pt x="739788" y="106413"/>
+                  </a:lnTo>
+                  <a:lnTo>
+                    <a:pt x="767783" y="128200"/>
+                  </a:lnTo>
+                  <a:lnTo>
+                    <a:pt x="795038" y="152005"/>
+                  </a:lnTo>
+                  <a:lnTo>
+                    <a:pt x="821432" y="177803"/>
+                  </a:lnTo>
+                  <a:lnTo>
+                    <a:pt x="846842" y="205562"/>
+                  </a:lnTo>
+                  <a:lnTo>
+                    <a:pt x="871146" y="235245"/>
+                  </a:lnTo>
+                  <a:lnTo>
+                    <a:pt x="894224" y="266805"/>
+                  </a:lnTo>
+                  <a:lnTo>
+                    <a:pt x="915960" y="300192"/>
+                  </a:lnTo>
+                  <a:lnTo>
+                    <a:pt x="936237" y="335346"/>
+                  </a:lnTo>
+                  <a:lnTo>
+                    <a:pt x="906038" y="365102"/>
+                  </a:lnTo>
+                  <a:lnTo>
+                    <a:pt x="874809" y="392601"/>
+                  </a:lnTo>
+                  <a:lnTo>
+                    <a:pt x="842677" y="417809"/>
+                  </a:lnTo>
+                  <a:lnTo>
+                    <a:pt x="809770" y="440699"/>
+                  </a:lnTo>
+                  <a:lnTo>
+                    <a:pt x="776216" y="461250"/>
+                  </a:lnTo>
+                  <a:lnTo>
+                    <a:pt x="742143" y="479446"/>
+                  </a:lnTo>
+                  <a:lnTo>
+                    <a:pt x="707680" y="495280"/>
+                  </a:lnTo>
+                  <a:lnTo>
+                    <a:pt x="672956" y="508748"/>
+                  </a:lnTo>
+                  <a:lnTo>
+                    <a:pt x="638100" y="519856"/>
+                  </a:lnTo>
+                  <a:lnTo>
+                    <a:pt x="603238" y="528614"/>
+                  </a:lnTo>
+                  <a:lnTo>
+                    <a:pt x="568498" y="535037"/>
+                  </a:lnTo>
+                  <a:lnTo>
+                    <a:pt x="534003" y="539150"/>
+                  </a:lnTo>
+                  <a:lnTo>
+                    <a:pt x="499879" y="540980"/>
+                  </a:lnTo>
+                  <a:lnTo>
+                    <a:pt x="466246" y="540563"/>
+                  </a:lnTo>
+                  <a:lnTo>
+                    <a:pt x="433225" y="537939"/>
+                  </a:lnTo>
+                  <a:lnTo>
+                    <a:pt x="400932" y="533155"/>
+                  </a:lnTo>
+                  <a:lnTo>
+                    <a:pt x="369482" y="526262"/>
+                  </a:lnTo>
+                  <a:lnTo>
+                    <a:pt x="338987" y="517319"/>
+                  </a:lnTo>
+                  <a:lnTo>
+                    <a:pt x="309554" y="506388"/>
+                  </a:lnTo>
+                  <a:lnTo>
+                    <a:pt x="281290" y="493537"/>
+                  </a:lnTo>
+                  <a:lnTo>
+                    <a:pt x="254295" y="478841"/>
+                  </a:lnTo>
+                  <a:lnTo>
+                    <a:pt x="224004" y="482876"/>
+                  </a:lnTo>
+                  <a:lnTo>
+                    <a:pt x="195292" y="481690"/>
+                  </a:lnTo>
+                  <a:lnTo>
+                    <a:pt x="168972" y="475785"/>
+                  </a:lnTo>
+                  <a:lnTo>
+                    <a:pt x="145750" y="465781"/>
+                  </a:lnTo>
+                  <a:lnTo>
+                    <a:pt x="126211" y="452398"/>
+                  </a:lnTo>
+                  <a:lnTo>
+                    <a:pt x="110800" y="436434"/>
+                  </a:lnTo>
+                  <a:lnTo>
+                    <a:pt x="93275" y="445998"/>
+                  </a:lnTo>
+                  <a:lnTo>
+                    <a:pt x="72799" y="452301"/>
+                  </a:lnTo>
+                  <a:lnTo>
+                    <a:pt x="50003" y="454667"/>
+                  </a:lnTo>
+                  <a:lnTo>
+                    <a:pt x="25654" y="452541"/>
+                  </a:lnTo>
+                  <a:lnTo>
+                    <a:pt x="631" y="445516"/>
+                  </a:lnTo>
+                  <a:lnTo>
+                    <a:pt x="0" y="415848"/>
+                  </a:lnTo>
+                  <a:lnTo>
+                    <a:pt x="5563" y="388968"/>
+                  </a:lnTo>
+                  <a:lnTo>
+                    <a:pt x="16394" y="366021"/>
+                  </a:lnTo>
+                  <a:lnTo>
+                    <a:pt x="31372" y="347926"/>
+                  </a:lnTo>
+                  <a:lnTo>
+                    <a:pt x="49228" y="335346"/>
+                  </a:lnTo>
+                  <a:lnTo>
+                    <a:pt x="56756" y="312960"/>
+                  </a:lnTo>
+                  <a:lnTo>
+                    <a:pt x="71611" y="296156"/>
+                  </a:lnTo>
+                  <a:lnTo>
+                    <a:pt x="61893" y="303725"/>
+                  </a:lnTo>
+                  <a:lnTo>
+                    <a:pt x="53711" y="313695"/>
+                  </a:lnTo>
+                  <a:lnTo>
+                    <a:pt x="47653" y="325735"/>
+                  </a:lnTo>
+                  <a:lnTo>
+                    <a:pt x="44231" y="339373"/>
+                  </a:lnTo>
+                  <a:lnTo>
+                    <a:pt x="43845" y="354011"/>
+                  </a:lnTo>
+                  <a:lnTo>
+                    <a:pt x="46759" y="368958"/>
+                  </a:lnTo>
+                  <a:lnTo>
+                    <a:pt x="53076" y="383454"/>
+                  </a:lnTo>
+                  <a:lnTo>
+                    <a:pt x="62721" y="396715"/>
+                  </a:lnTo>
+                  <a:lnTo>
+                    <a:pt x="75439" y="407972"/>
+                  </a:lnTo>
+                  <a:lnTo>
+                    <a:pt x="90795" y="416511"/>
+                  </a:lnTo>
+                  <a:lnTo>
+                    <a:pt x="108191" y="421718"/>
+                  </a:lnTo>
+                  <a:lnTo>
+                    <a:pt x="126884" y="423113"/>
+                  </a:lnTo>
+                  <a:lnTo>
+                    <a:pt x="146025" y="420386"/>
+                  </a:lnTo>
+                  <a:lnTo>
+                    <a:pt x="164689" y="413417"/>
+                  </a:lnTo>
+                  <a:lnTo>
+                    <a:pt x="181925" y="402299"/>
+                  </a:lnTo>
+                  <a:lnTo>
+                    <a:pt x="196804" y="387337"/>
+                  </a:lnTo>
+                  <a:lnTo>
+                    <a:pt x="208464" y="369048"/>
+                  </a:lnTo>
+                  <a:lnTo>
+                    <a:pt x="216158" y="348139"/>
+                  </a:lnTo>
+                  <a:lnTo>
+                    <a:pt x="219302" y="325486"/>
+                  </a:lnTo>
+                  <a:lnTo>
+                    <a:pt x="217506" y="302095"/>
+                  </a:lnTo>
+                  <a:lnTo>
+                    <a:pt x="210604" y="279057"/>
+                  </a:lnTo>
+                  <a:lnTo>
+                    <a:pt x="198676" y="257495"/>
+                  </a:lnTo>
+                  <a:lnTo>
+                    <a:pt x="182049" y="238517"/>
+                  </a:lnTo>
+                  <a:lnTo>
+                    <a:pt x="161295" y="223151"/>
+                  </a:lnTo>
+                  <a:lnTo>
+                    <a:pt x="137214" y="212297"/>
                   </a:lnTo>
                   <a:close/>
                 </a:path>
@@ -6982,7 +6982,7 @@
           </p:nvSpPr>
           <p:spPr>
             <a:xfrm>
-              <a:off x="1948716" y="1342000"/>
+              <a:off x="1948716" y="1341559"/>
               <a:ext cx="41777" cy="41777"/>
             </a:xfrm>
             <a:prstGeom prst="ellipse">
@@ -7017,7 +7017,7 @@
           </p:nvSpPr>
           <p:spPr>
             <a:xfrm>
-              <a:off x="2286983" y="1131962"/>
+              <a:off x="2284062" y="1134882"/>
               <a:ext cx="41777" cy="41777"/>
             </a:xfrm>
             <a:prstGeom prst="ellipse">
@@ -7052,7 +7052,7 @@
           </p:nvSpPr>
           <p:spPr>
             <a:xfrm>
-              <a:off x="2772871" y="1470229"/>
+              <a:off x="2774153" y="1470229"/>
               <a:ext cx="41777" cy="41777"/>
             </a:xfrm>
             <a:prstGeom prst="ellipse">
@@ -7087,7 +7087,7 @@
           </p:nvSpPr>
           <p:spPr>
             <a:xfrm>
-              <a:off x="2091516" y="1613029"/>
+              <a:off x="2092210" y="1613723"/>
               <a:ext cx="41777" cy="41777"/>
             </a:xfrm>
             <a:prstGeom prst="ellipse">
@@ -7122,7 +7122,7 @@
           </p:nvSpPr>
           <p:spPr>
             <a:xfrm>
-              <a:off x="1948716" y="1570513"/>
+              <a:off x="1948716" y="1571316"/>
               <a:ext cx="41777" cy="41777"/>
             </a:xfrm>
             <a:prstGeom prst="ellipse">
@@ -7157,7 +7157,7 @@
           </p:nvSpPr>
           <p:spPr>
             <a:xfrm>
-              <a:off x="1839251" y="1579693"/>
+              <a:off x="1838546" y="1580399"/>
               <a:ext cx="41777" cy="41777"/>
             </a:xfrm>
             <a:prstGeom prst="ellipse">
@@ -7192,7 +7192,7 @@
           </p:nvSpPr>
           <p:spPr>
             <a:xfrm>
-              <a:off x="1887150" y="1470229"/>
+              <a:off x="1887143" y="1470229"/>
               <a:ext cx="41777" cy="41777"/>
             </a:xfrm>
             <a:prstGeom prst="ellipse">
@@ -7227,7 +7227,7 @@
           </p:nvSpPr>
           <p:spPr>
             <a:xfrm>
-              <a:off x="1909256" y="1430769"/>
+              <a:off x="1909526" y="1431039"/>
               <a:ext cx="41777" cy="41777"/>
             </a:xfrm>
             <a:prstGeom prst="ellipse">
@@ -8143,7 +8143,7 @@
           </p:nvSpPr>
           <p:spPr>
             <a:xfrm>
-              <a:off x="4006111" y="1550656"/>
+              <a:off x="4006111" y="1475402"/>
               <a:ext cx="2937962" cy="0"/>
             </a:xfrm>
             <a:custGeom>
@@ -8186,15 +8186,15 @@
           </p:nvSpPr>
           <p:spPr>
             <a:xfrm>
-              <a:off x="4171819" y="1094739"/>
-              <a:ext cx="0" cy="973174"/>
+              <a:off x="4171819" y="1053357"/>
+              <a:ext cx="0" cy="900873"/>
             </a:xfrm>
             <a:custGeom>
               <a:avLst/>
               <a:pathLst>
-                <a:path w="0" h="973174">
+                <a:path w="0" h="900873">
                   <a:moveTo>
-                    <a:pt x="0" y="973174"/>
+                    <a:pt x="0" y="900873"/>
                   </a:moveTo>
                   <a:lnTo>
                     <a:pt x="0" y="0"/>
@@ -8226,15 +8226,15 @@
           </p:nvSpPr>
           <p:spPr>
             <a:xfrm>
-              <a:off x="4530107" y="1323692"/>
-              <a:ext cx="0" cy="467008"/>
+              <a:off x="4530107" y="1265300"/>
+              <a:ext cx="0" cy="432312"/>
             </a:xfrm>
             <a:custGeom>
               <a:avLst/>
               <a:pathLst>
-                <a:path w="0" h="467008">
+                <a:path w="0" h="432312">
                   <a:moveTo>
-                    <a:pt x="0" y="467008"/>
+                    <a:pt x="0" y="432312"/>
                   </a:moveTo>
                   <a:lnTo>
                     <a:pt x="0" y="0"/>
@@ -8266,15 +8266,15 @@
           </p:nvSpPr>
           <p:spPr>
             <a:xfrm>
-              <a:off x="4888395" y="1396887"/>
-              <a:ext cx="0" cy="315818"/>
+              <a:off x="4888395" y="1333057"/>
+              <a:ext cx="0" cy="292354"/>
             </a:xfrm>
             <a:custGeom>
               <a:avLst/>
               <a:pathLst>
-                <a:path w="0" h="315818">
+                <a:path w="0" h="292354">
                   <a:moveTo>
-                    <a:pt x="0" y="315818"/>
+                    <a:pt x="0" y="292354"/>
                   </a:moveTo>
                   <a:lnTo>
                     <a:pt x="0" y="0"/>
@@ -8306,15 +8306,15 @@
           </p:nvSpPr>
           <p:spPr>
             <a:xfrm>
-              <a:off x="5246683" y="1151448"/>
-              <a:ext cx="0" cy="840690"/>
+              <a:off x="5246683" y="1105853"/>
+              <a:ext cx="0" cy="778231"/>
             </a:xfrm>
             <a:custGeom>
               <a:avLst/>
               <a:pathLst>
-                <a:path w="0" h="840690">
+                <a:path w="0" h="778231">
                   <a:moveTo>
-                    <a:pt x="0" y="840690"/>
+                    <a:pt x="0" y="778231"/>
                   </a:moveTo>
                   <a:lnTo>
                     <a:pt x="0" y="0"/>
@@ -8346,15 +8346,15 @@
           </p:nvSpPr>
           <p:spPr>
             <a:xfrm>
-              <a:off x="5604971" y="969303"/>
-              <a:ext cx="0" cy="1245575"/>
+              <a:off x="5604971" y="937240"/>
+              <a:ext cx="0" cy="1153036"/>
             </a:xfrm>
             <a:custGeom>
               <a:avLst/>
               <a:pathLst>
-                <a:path w="0" h="1245575">
+                <a:path w="0" h="1153036">
                   <a:moveTo>
-                    <a:pt x="0" y="1245575"/>
+                    <a:pt x="0" y="1153036"/>
                   </a:moveTo>
                   <a:lnTo>
                     <a:pt x="0" y="0"/>
@@ -8386,15 +8386,15 @@
           </p:nvSpPr>
           <p:spPr>
             <a:xfrm>
-              <a:off x="5963259" y="1229755"/>
-              <a:ext cx="0" cy="710735"/>
+              <a:off x="5963259" y="1178342"/>
+              <a:ext cx="0" cy="657932"/>
             </a:xfrm>
             <a:custGeom>
               <a:avLst/>
               <a:pathLst>
-                <a:path w="0" h="710735">
+                <a:path w="0" h="657932">
                   <a:moveTo>
-                    <a:pt x="0" y="710735"/>
+                    <a:pt x="0" y="657932"/>
                   </a:moveTo>
                   <a:lnTo>
                     <a:pt x="0" y="0"/>
@@ -8426,15 +8426,15 @@
           </p:nvSpPr>
           <p:spPr>
             <a:xfrm>
-              <a:off x="6321547" y="816446"/>
-              <a:ext cx="0" cy="1571079"/>
+              <a:off x="6321547" y="795740"/>
+              <a:ext cx="0" cy="1454357"/>
             </a:xfrm>
             <a:custGeom>
               <a:avLst/>
               <a:pathLst>
-                <a:path w="0" h="1571079">
+                <a:path w="0" h="1454357">
                   <a:moveTo>
-                    <a:pt x="0" y="1571079"/>
+                    <a:pt x="0" y="1454357"/>
                   </a:moveTo>
                   <a:lnTo>
                     <a:pt x="0" y="0"/>
@@ -8466,15 +8466,15 @@
           </p:nvSpPr>
           <p:spPr>
             <a:xfrm>
-              <a:off x="6679835" y="906630"/>
-              <a:ext cx="0" cy="1508013"/>
+              <a:off x="6679835" y="879224"/>
+              <a:ext cx="0" cy="1395977"/>
             </a:xfrm>
             <a:custGeom>
               <a:avLst/>
               <a:pathLst>
-                <a:path w="0" h="1508013">
+                <a:path w="0" h="1395977">
                   <a:moveTo>
-                    <a:pt x="0" y="1508013"/>
+                    <a:pt x="0" y="1395977"/>
                   </a:moveTo>
                   <a:lnTo>
                     <a:pt x="0" y="0"/>
@@ -8506,15 +8506,15 @@
           </p:nvSpPr>
           <p:spPr>
             <a:xfrm>
-              <a:off x="4270348" y="1119650"/>
-              <a:ext cx="0" cy="973118"/>
+              <a:off x="4270348" y="1006353"/>
+              <a:ext cx="0" cy="977797"/>
             </a:xfrm>
             <a:custGeom>
               <a:avLst/>
               <a:pathLst>
-                <a:path w="0" h="973118">
+                <a:path w="0" h="977797">
                   <a:moveTo>
-                    <a:pt x="0" y="973118"/>
+                    <a:pt x="0" y="977797"/>
                   </a:moveTo>
                   <a:lnTo>
                     <a:pt x="0" y="0"/>
@@ -8546,15 +8546,15 @@
           </p:nvSpPr>
           <p:spPr>
             <a:xfrm>
-              <a:off x="4628636" y="1336602"/>
-              <a:ext cx="0" cy="425166"/>
+              <a:off x="4628636" y="1271740"/>
+              <a:ext cx="0" cy="425570"/>
             </a:xfrm>
             <a:custGeom>
               <a:avLst/>
               <a:pathLst>
-                <a:path w="0" h="425166">
+                <a:path w="0" h="425570">
                   <a:moveTo>
-                    <a:pt x="0" y="425166"/>
+                    <a:pt x="0" y="425570"/>
                   </a:moveTo>
                   <a:lnTo>
                     <a:pt x="0" y="0"/>
@@ -8586,15 +8586,15 @@
           </p:nvSpPr>
           <p:spPr>
             <a:xfrm>
-              <a:off x="4986924" y="1406093"/>
-              <a:ext cx="0" cy="297134"/>
+              <a:off x="4986924" y="1337580"/>
+              <a:ext cx="0" cy="265880"/>
             </a:xfrm>
             <a:custGeom>
               <a:avLst/>
               <a:pathLst>
-                <a:path w="0" h="297134">
+                <a:path w="0" h="265880">
                   <a:moveTo>
-                    <a:pt x="0" y="297134"/>
+                    <a:pt x="0" y="265880"/>
                   </a:moveTo>
                   <a:lnTo>
                     <a:pt x="0" y="0"/>
@@ -8626,15 +8626,15 @@
           </p:nvSpPr>
           <p:spPr>
             <a:xfrm>
-              <a:off x="5345212" y="1226420"/>
-              <a:ext cx="0" cy="756811"/>
+              <a:off x="5345212" y="1159688"/>
+              <a:ext cx="0" cy="688272"/>
             </a:xfrm>
             <a:custGeom>
               <a:avLst/>
               <a:pathLst>
-                <a:path w="0" h="756811">
+                <a:path w="0" h="688272">
                   <a:moveTo>
-                    <a:pt x="0" y="756811"/>
+                    <a:pt x="0" y="688272"/>
                   </a:moveTo>
                   <a:lnTo>
                     <a:pt x="0" y="0"/>
@@ -8666,15 +8666,15 @@
           </p:nvSpPr>
           <p:spPr>
             <a:xfrm>
-              <a:off x="5703500" y="1072521"/>
-              <a:ext cx="0" cy="1111354"/>
+              <a:off x="5703500" y="1048862"/>
+              <a:ext cx="0" cy="1028787"/>
             </a:xfrm>
             <a:custGeom>
               <a:avLst/>
               <a:pathLst>
-                <a:path w="0" h="1111354">
+                <a:path w="0" h="1028787">
                   <a:moveTo>
-                    <a:pt x="0" y="1111354"/>
+                    <a:pt x="0" y="1028787"/>
                   </a:moveTo>
                   <a:lnTo>
                     <a:pt x="0" y="0"/>
@@ -8706,15 +8706,15 @@
           </p:nvSpPr>
           <p:spPr>
             <a:xfrm>
-              <a:off x="6061789" y="1206848"/>
-              <a:ext cx="0" cy="704101"/>
+              <a:off x="6061789" y="1137378"/>
+              <a:ext cx="0" cy="684483"/>
             </a:xfrm>
             <a:custGeom>
               <a:avLst/>
               <a:pathLst>
-                <a:path w="0" h="704101">
+                <a:path w="0" h="684483">
                   <a:moveTo>
-                    <a:pt x="0" y="704101"/>
+                    <a:pt x="0" y="684483"/>
                   </a:moveTo>
                   <a:lnTo>
                     <a:pt x="0" y="0"/>
@@ -8746,15 +8746,15 @@
           </p:nvSpPr>
           <p:spPr>
             <a:xfrm>
-              <a:off x="6420077" y="866159"/>
-              <a:ext cx="0" cy="1764263"/>
+              <a:off x="6420077" y="768720"/>
+              <a:ext cx="0" cy="1706432"/>
             </a:xfrm>
             <a:custGeom>
               <a:avLst/>
               <a:pathLst>
-                <a:path w="0" h="1764263">
+                <a:path w="0" h="1706432">
                   <a:moveTo>
-                    <a:pt x="0" y="1764263"/>
+                    <a:pt x="0" y="1706432"/>
                   </a:moveTo>
                   <a:lnTo>
                     <a:pt x="0" y="0"/>
@@ -8786,15 +8786,15 @@
           </p:nvSpPr>
           <p:spPr>
             <a:xfrm>
-              <a:off x="6778365" y="734481"/>
-              <a:ext cx="0" cy="1871457"/>
+              <a:off x="6778365" y="706051"/>
+              <a:ext cx="0" cy="1924370"/>
             </a:xfrm>
             <a:custGeom>
               <a:avLst/>
               <a:pathLst>
-                <a:path w="0" h="1871457">
+                <a:path w="0" h="1924370">
                   <a:moveTo>
-                    <a:pt x="0" y="1871457"/>
+                    <a:pt x="0" y="1924370"/>
                   </a:moveTo>
                   <a:lnTo>
                     <a:pt x="0" y="0"/>
@@ -8826,7 +8826,7 @@
           </p:nvSpPr>
           <p:spPr>
             <a:xfrm>
-              <a:off x="4140673" y="1585026"/>
+              <a:off x="4140673" y="1504905"/>
               <a:ext cx="62292" cy="62292"/>
             </a:xfrm>
             <a:prstGeom prst="ellipse">
@@ -8861,7 +8861,7 @@
           </p:nvSpPr>
           <p:spPr>
             <a:xfrm>
-              <a:off x="4498961" y="1255774"/>
+              <a:off x="4498961" y="1200114"/>
               <a:ext cx="62292" cy="62292"/>
             </a:xfrm>
             <a:prstGeom prst="ellipse">
@@ -8896,7 +8896,7 @@
           </p:nvSpPr>
           <p:spPr>
             <a:xfrm>
-              <a:off x="4857249" y="1499255"/>
+              <a:off x="4857249" y="1425506"/>
               <a:ext cx="62292" cy="62292"/>
             </a:xfrm>
             <a:prstGeom prst="ellipse">
@@ -8931,7 +8931,7 @@
           </p:nvSpPr>
           <p:spPr>
             <a:xfrm>
-              <a:off x="5215537" y="2002434"/>
+              <a:off x="5215537" y="1891301"/>
               <a:ext cx="62292" cy="62292"/>
             </a:xfrm>
             <a:prstGeom prst="ellipse">
@@ -8966,7 +8966,7 @@
           </p:nvSpPr>
           <p:spPr>
             <a:xfrm>
-              <a:off x="5573825" y="2391090"/>
+              <a:off x="5573825" y="2251082"/>
               <a:ext cx="62292" cy="62292"/>
             </a:xfrm>
             <a:prstGeom prst="ellipse">
@@ -9001,7 +9001,7 @@
           </p:nvSpPr>
           <p:spPr>
             <a:xfrm>
-              <a:off x="5932113" y="1384671"/>
+              <a:off x="5932113" y="1319435"/>
               <a:ext cx="62292" cy="62292"/>
             </a:xfrm>
             <a:prstGeom prst="ellipse">
@@ -9036,7 +9036,7 @@
           </p:nvSpPr>
           <p:spPr>
             <a:xfrm>
-              <a:off x="6290401" y="2114397"/>
+              <a:off x="6290401" y="1994946"/>
               <a:ext cx="62292" cy="62292"/>
             </a:xfrm>
             <a:prstGeom prst="ellipse">
@@ -9071,7 +9071,7 @@
           </p:nvSpPr>
           <p:spPr>
             <a:xfrm>
-              <a:off x="6648689" y="1200806"/>
+              <a:off x="6648689" y="1149230"/>
               <a:ext cx="62292" cy="62292"/>
             </a:xfrm>
             <a:prstGeom prst="ellipse">
@@ -9106,7 +9106,7 @@
           </p:nvSpPr>
           <p:spPr>
             <a:xfrm>
-              <a:off x="4239202" y="1179491"/>
+              <a:off x="4239202" y="1136410"/>
               <a:ext cx="62292" cy="62292"/>
             </a:xfrm>
             <a:prstGeom prst="ellipse">
@@ -9141,7 +9141,7 @@
           </p:nvSpPr>
           <p:spPr>
             <a:xfrm>
-              <a:off x="4597490" y="1180386"/>
+              <a:off x="4597490" y="1112864"/>
               <a:ext cx="62292" cy="62292"/>
             </a:xfrm>
             <a:prstGeom prst="ellipse">
@@ -9167,7 +9167,7 @@
           </p:nvSpPr>
           <p:spPr>
             <a:xfrm>
-              <a:off x="4955778" y="1753169"/>
+              <a:off x="4955778" y="1663685"/>
               <a:ext cx="62292" cy="62292"/>
             </a:xfrm>
             <a:prstGeom prst="ellipse">
@@ -9193,7 +9193,7 @@
           </p:nvSpPr>
           <p:spPr>
             <a:xfrm>
-              <a:off x="5314066" y="1993527"/>
+              <a:off x="5314066" y="1892822"/>
               <a:ext cx="62292" cy="62292"/>
             </a:xfrm>
             <a:prstGeom prst="ellipse">
@@ -9228,33 +9228,7 @@
           </p:nvSpPr>
           <p:spPr>
             <a:xfrm>
-              <a:off x="5672354" y="2549389"/>
-              <a:ext cx="62292" cy="62292"/>
-            </a:xfrm>
-            <a:prstGeom prst="ellipse">
-              <a:avLst/>
-            </a:prstGeom>
-            <a:solidFill>
-              <a:srgbClr val="D55E00">
-                <a:alpha val="100000"/>
-              </a:srgbClr>
-            </a:solidFill>
-          </p:spPr>
-          <p:txBody>
-            <a:bodyPr/>
-            <a:lstStyle/>
-            <a:p/>
-          </p:txBody>
-        </p:sp>
-        <p:sp>
-          <p:nvSpPr>
-            <p:cNvPr id="100" name="pt100"/>
-            <p:cNvSpPr/>
-            <p:nvPr/>
-          </p:nvSpPr>
-          <p:spPr>
-            <a:xfrm>
-              <a:off x="6030642" y="1253922"/>
+              <a:off x="5672354" y="2413693"/>
               <a:ext cx="62292" cy="62292"/>
             </a:xfrm>
             <a:prstGeom prst="ellipse">
@@ -9283,13 +9257,13 @@
         </p:sp>
         <p:sp>
           <p:nvSpPr>
-            <p:cNvPr id="101" name="pt101"/>
-            <p:cNvSpPr/>
-            <p:nvPr/>
-          </p:nvSpPr>
-          <p:spPr>
-            <a:xfrm>
-              <a:off x="6388930" y="1599515"/>
+            <p:cNvPr id="100" name="pt100"/>
+            <p:cNvSpPr/>
+            <p:nvPr/>
+          </p:nvSpPr>
+          <p:spPr>
+            <a:xfrm>
+              <a:off x="6030642" y="1211332"/>
               <a:ext cx="62292" cy="62292"/>
             </a:xfrm>
             <a:prstGeom prst="ellipse">
@@ -9318,6 +9292,41 @@
         </p:sp>
         <p:sp>
           <p:nvSpPr>
+            <p:cNvPr id="101" name="pt101"/>
+            <p:cNvSpPr/>
+            <p:nvPr/>
+          </p:nvSpPr>
+          <p:spPr>
+            <a:xfrm>
+              <a:off x="6388930" y="1518522"/>
+              <a:ext cx="62292" cy="62292"/>
+            </a:xfrm>
+            <a:prstGeom prst="ellipse">
+              <a:avLst/>
+            </a:prstGeom>
+            <a:solidFill>
+              <a:srgbClr val="FFFFFF">
+                <a:alpha val="100000"/>
+              </a:srgbClr>
+            </a:solidFill>
+            <a:ln w="10800" cap="rnd">
+              <a:solidFill>
+                <a:srgbClr val="D55E00">
+                  <a:alpha val="100000"/>
+                </a:srgbClr>
+              </a:solidFill>
+              <a:prstDash val="solid"/>
+              <a:round/>
+            </a:ln>
+          </p:spPr>
+          <p:txBody>
+            <a:bodyPr/>
+            <a:lstStyle/>
+            <a:p/>
+          </p:txBody>
+        </p:sp>
+        <p:sp>
+          <p:nvSpPr>
             <p:cNvPr id="102" name="pt102"/>
             <p:cNvSpPr/>
             <p:nvPr/>
@@ -9390,7 +9399,7 @@
           </p:nvSpPr>
           <p:spPr>
             <a:xfrm>
-              <a:off x="3787466" y="2144717"/>
+              <a:off x="3787466" y="2022963"/>
               <a:ext cx="173095" cy="63642"/>
             </a:xfrm>
             <a:prstGeom prst="rect">
@@ -9433,7 +9442,7 @@
           </p:nvSpPr>
           <p:spPr>
             <a:xfrm>
-              <a:off x="3911093" y="1518835"/>
+              <a:off x="3911093" y="1443581"/>
               <a:ext cx="49469" cy="63642"/>
             </a:xfrm>
             <a:prstGeom prst="rect">
@@ -9476,7 +9485,7 @@
           </p:nvSpPr>
           <p:spPr>
             <a:xfrm>
-              <a:off x="3836935" y="636703"/>
+              <a:off x="3836935" y="626986"/>
               <a:ext cx="123626" cy="63642"/>
             </a:xfrm>
             <a:prstGeom prst="rect">
@@ -9519,7 +9528,7 @@
           </p:nvSpPr>
           <p:spPr>
             <a:xfrm>
-              <a:off x="3980806" y="2176538"/>
+              <a:off x="3980806" y="2054785"/>
               <a:ext cx="25305" cy="0"/>
             </a:xfrm>
             <a:custGeom>
@@ -9559,7 +9568,7 @@
           </p:nvSpPr>
           <p:spPr>
             <a:xfrm>
-              <a:off x="3980806" y="1550656"/>
+              <a:off x="3980806" y="1475402"/>
               <a:ext cx="25305" cy="0"/>
             </a:xfrm>
             <a:custGeom>
@@ -9599,7 +9608,7 @@
           </p:nvSpPr>
           <p:spPr>
             <a:xfrm>
-              <a:off x="3980806" y="668524"/>
+              <a:off x="3980806" y="658807"/>
               <a:ext cx="25305" cy="0"/>
             </a:xfrm>
             <a:custGeom>
